--- a/Partie_Matlab.pptx
+++ b/Partie_Matlab.pptx
@@ -8,8 +8,9 @@
     <p:sldId id="256" r:id="rId2"/>
     <p:sldId id="257" r:id="rId3"/>
     <p:sldId id="258" r:id="rId4"/>
-    <p:sldId id="259" r:id="rId5"/>
-    <p:sldId id="260" r:id="rId6"/>
+    <p:sldId id="261" r:id="rId5"/>
+    <p:sldId id="259" r:id="rId6"/>
+    <p:sldId id="260" r:id="rId7"/>
   </p:sldIdLst>
   <p:sldSz cx="12192000" cy="6858000"/>
   <p:notesSz cx="6858000" cy="9144000"/>
@@ -108,6 +109,11 @@
       </a:defRPr>
     </a:lvl9pPr>
   </p:defaultTextStyle>
+  <p:extLst>
+    <p:ext uri="{EFAFB233-063F-42B5-8137-9DF3F51BA10A}">
+      <p15:sldGuideLst xmlns:p15="http://schemas.microsoft.com/office/powerpoint/2012/main"/>
+    </p:ext>
+  </p:extLst>
 </p:presentation>
 </file>
 
@@ -3737,8 +3743,8 @@
         </p:blipFill>
         <p:spPr>
           <a:xfrm>
-            <a:off x="6756399" y="2648430"/>
-            <a:ext cx="4368801" cy="2696309"/>
+            <a:off x="6040662" y="2343714"/>
+            <a:ext cx="4708080" cy="2905703"/>
           </a:xfrm>
           <a:prstGeom prst="rect">
             <a:avLst/>
@@ -3767,7 +3773,7 @@
         </p:blipFill>
         <p:spPr>
           <a:xfrm>
-            <a:off x="2494724" y="3904722"/>
+            <a:off x="985270" y="3796566"/>
             <a:ext cx="2812030" cy="2696309"/>
           </a:xfrm>
           <a:prstGeom prst="rect">
@@ -3810,6 +3816,94 @@
           <p:cNvPr id="2" name="Titre 1">
             <a:extLst>
               <a:ext uri="{FF2B5EF4-FFF2-40B4-BE49-F238E27FC236}">
+                <a16:creationId xmlns:a16="http://schemas.microsoft.com/office/drawing/2014/main" id="{ACCB4A42-D14E-4925-B0E1-0CDF637E6EEB}"/>
+              </a:ext>
+            </a:extLst>
+          </p:cNvPr>
+          <p:cNvSpPr>
+            <a:spLocks noGrp="1"/>
+          </p:cNvSpPr>
+          <p:nvPr>
+            <p:ph type="title"/>
+          </p:nvPr>
+        </p:nvSpPr>
+        <p:spPr/>
+        <p:txBody>
+          <a:bodyPr/>
+          <a:lstStyle/>
+          <a:p>
+            <a:pPr algn="ctr"/>
+            <a:r>
+              <a:rPr lang="fr-FR" b="1" u="sng" dirty="0"/>
+              <a:t>Architecture</a:t>
+            </a:r>
+          </a:p>
+        </p:txBody>
+      </p:sp>
+      <p:pic>
+        <p:nvPicPr>
+          <p:cNvPr id="5" name="Espace réservé du contenu 4">
+            <a:extLst>
+              <a:ext uri="{FF2B5EF4-FFF2-40B4-BE49-F238E27FC236}">
+                <a16:creationId xmlns:a16="http://schemas.microsoft.com/office/drawing/2014/main" id="{CB94BA95-EF25-4C11-B1E2-474BDD0EDE7F}"/>
+              </a:ext>
+            </a:extLst>
+          </p:cNvPr>
+          <p:cNvPicPr>
+            <a:picLocks noGrp="1" noChangeAspect="1"/>
+          </p:cNvPicPr>
+          <p:nvPr>
+            <p:ph idx="1"/>
+          </p:nvPr>
+        </p:nvPicPr>
+        <p:blipFill>
+          <a:blip r:embed="rId2"/>
+          <a:stretch>
+            <a:fillRect/>
+          </a:stretch>
+        </p:blipFill>
+        <p:spPr>
+          <a:xfrm>
+            <a:off x="1676889" y="1622425"/>
+            <a:ext cx="8279422" cy="4351338"/>
+          </a:xfrm>
+        </p:spPr>
+      </p:pic>
+    </p:spTree>
+    <p:extLst>
+      <p:ext uri="{BB962C8B-B14F-4D97-AF65-F5344CB8AC3E}">
+        <p14:creationId xmlns:p14="http://schemas.microsoft.com/office/powerpoint/2010/main" val="2135825765"/>
+      </p:ext>
+    </p:extLst>
+  </p:cSld>
+  <p:clrMapOvr>
+    <a:masterClrMapping/>
+  </p:clrMapOvr>
+</p:sld>
+</file>
+
+<file path=ppt/slides/slide5.xml><?xml version="1.0" encoding="utf-8"?>
+<p:sld xmlns:a="http://schemas.openxmlformats.org/drawingml/2006/main" xmlns:r="http://schemas.openxmlformats.org/officeDocument/2006/relationships" xmlns:p="http://schemas.openxmlformats.org/presentationml/2006/main">
+  <p:cSld>
+    <p:spTree>
+      <p:nvGrpSpPr>
+        <p:cNvPr id="1" name=""/>
+        <p:cNvGrpSpPr/>
+        <p:nvPr/>
+      </p:nvGrpSpPr>
+      <p:grpSpPr>
+        <a:xfrm>
+          <a:off x="0" y="0"/>
+          <a:ext cx="0" cy="0"/>
+          <a:chOff x="0" y="0"/>
+          <a:chExt cx="0" cy="0"/>
+        </a:xfrm>
+      </p:grpSpPr>
+      <p:sp>
+        <p:nvSpPr>
+          <p:cNvPr id="2" name="Titre 1">
+            <a:extLst>
+              <a:ext uri="{FF2B5EF4-FFF2-40B4-BE49-F238E27FC236}">
                 <a16:creationId xmlns:a16="http://schemas.microsoft.com/office/drawing/2014/main" id="{35CDAE3D-852D-4A95-8546-6C21B279636E}"/>
               </a:ext>
             </a:extLst>
@@ -3900,7 +3994,10 @@
             <a:endParaRPr lang="fr-FR" dirty="0"/>
           </a:p>
           <a:p>
-            <a:endParaRPr lang="fr-FR" dirty="0"/>
+            <a:r>
+              <a:rPr lang="fr-FR" dirty="0"/>
+              <a:t>Problème pour des images Noir et Blanc </a:t>
+            </a:r>
           </a:p>
         </p:txBody>
       </p:sp>
@@ -3934,6 +4031,36 @@
           </a:prstGeom>
         </p:spPr>
       </p:pic>
+      <p:pic>
+        <p:nvPicPr>
+          <p:cNvPr id="6" name="Image 5">
+            <a:extLst>
+              <a:ext uri="{FF2B5EF4-FFF2-40B4-BE49-F238E27FC236}">
+                <a16:creationId xmlns:a16="http://schemas.microsoft.com/office/drawing/2014/main" id="{F81BD3C1-B15B-475A-9E56-AD8700D5C132}"/>
+              </a:ext>
+            </a:extLst>
+          </p:cNvPr>
+          <p:cNvPicPr>
+            <a:picLocks noChangeAspect="1"/>
+          </p:cNvPicPr>
+          <p:nvPr/>
+        </p:nvPicPr>
+        <p:blipFill>
+          <a:blip r:embed="rId3"/>
+          <a:stretch>
+            <a:fillRect/>
+          </a:stretch>
+        </p:blipFill>
+        <p:spPr>
+          <a:xfrm>
+            <a:off x="7296041" y="5382648"/>
+            <a:ext cx="1562318" cy="495369"/>
+          </a:xfrm>
+          <a:prstGeom prst="rect">
+            <a:avLst/>
+          </a:prstGeom>
+        </p:spPr>
+      </p:pic>
     </p:spTree>
     <p:extLst>
       <p:ext uri="{BB962C8B-B14F-4D97-AF65-F5344CB8AC3E}">
@@ -3947,7 +4074,7 @@
 </p:sld>
 </file>
 
-<file path=ppt/slides/slide5.xml><?xml version="1.0" encoding="utf-8"?>
+<file path=ppt/slides/slide6.xml><?xml version="1.0" encoding="utf-8"?>
 <p:sld xmlns:a="http://schemas.openxmlformats.org/drawingml/2006/main" xmlns:r="http://schemas.openxmlformats.org/officeDocument/2006/relationships" xmlns:p="http://schemas.openxmlformats.org/presentationml/2006/main">
   <p:cSld>
     <p:spTree>
